--- a/examples/software-architecture-demo/outputs/tech-route.pptx
+++ b/examples/software-architecture-demo/outputs/tech-route.pptx
@@ -87,14 +87,75 @@
       </p:grpSpPr>
       <p:sp>
         <p:nvSpPr>
-          <p:cNvPr id="2" name="Title"/>
-          <p:cNvSpPr/>
-          <p:nvPr/>
-        </p:nvSpPr>
-        <p:spPr>
-          <a:xfrm>
-            <a:off x="1150000" y="1942013"/>
-            <a:ext cx="9892000" cy="360000"/>
+          <p:cNvPr id="2" name="Title Band"/>
+          <p:cNvSpPr/>
+          <p:nvPr/>
+        </p:nvSpPr>
+        <p:spPr>
+          <a:xfrm>
+            <a:off x="870000" y="968641"/>
+            <a:ext cx="10452000" cy="430000"/>
+          </a:xfrm>
+          <a:prstGeom prst="roundRect">
+            <a:avLst/>
+          </a:prstGeom>
+          <a:solidFill>
+            <a:srgbClr val="FFFFFF"/>
+          </a:solidFill>
+          <a:ln w="12700">
+            <a:solidFill>
+              <a:srgbClr val="FFFFFF"/>
+            </a:solidFill>
+          </a:ln>
+        </p:spPr>
+        <p:txBody>
+          <a:bodyPr wrap="square" anchor="ctr"/>
+          <a:lstStyle/>
+          <a:p>
+            <a:pPr algn="ctr"/>
+            <a:r>
+              <a:rPr lang="en-US" sz="2100" b="1">
+                <a:solidFill>
+                  <a:srgbClr val="111111"/>
+                </a:solidFill>
+              </a:rPr>
+              <a:t>Software</a:t>
+            </a:r>
+          </a:p>
+          <a:p>
+            <a:pPr algn="ctr"/>
+            <a:r>
+              <a:rPr lang="en-US" sz="2100" b="1">
+                <a:solidFill>
+                  <a:srgbClr val="111111"/>
+                </a:solidFill>
+              </a:rPr>
+              <a:t>Architecture</a:t>
+            </a:r>
+          </a:p>
+          <a:p>
+            <a:pPr algn="ctr"/>
+            <a:r>
+              <a:rPr lang="en-US" sz="2100" b="1">
+                <a:solidFill>
+                  <a:srgbClr val="111111"/>
+                </a:solidFill>
+              </a:rPr>
+              <a:t>Technical Route</a:t>
+            </a:r>
+          </a:p>
+        </p:txBody>
+      </p:sp>
+      <p:sp>
+        <p:nvSpPr>
+          <p:cNvPr id="3" name="Subtitle"/>
+          <p:cNvSpPr/>
+          <p:nvPr/>
+        </p:nvSpPr>
+        <p:spPr>
+          <a:xfrm>
+            <a:off x="1700000" y="1413641"/>
+            <a:ext cx="8792000" cy="190000"/>
           </a:xfrm>
           <a:prstGeom prst="rect">
             <a:avLst/>
@@ -114,59 +175,49 @@
           <a:p>
             <a:pPr algn="ctr"/>
             <a:r>
-              <a:rPr lang="en-US" sz="2100" b="1">
-                <a:solidFill>
-                  <a:srgbClr val="111827"/>
-                </a:solidFill>
-              </a:rPr>
-              <a:t>Software</a:t>
-            </a:r>
-          </a:p>
-          <a:p>
-            <a:pPr algn="ctr"/>
-            <a:r>
-              <a:rPr lang="en-US" sz="2100" b="1">
-                <a:solidFill>
-                  <a:srgbClr val="111827"/>
-                </a:solidFill>
-              </a:rPr>
-              <a:t>Architecture</a:t>
-            </a:r>
-          </a:p>
-          <a:p>
-            <a:pPr algn="ctr"/>
-            <a:r>
-              <a:rPr lang="en-US" sz="2100" b="1">
-                <a:solidFill>
-                  <a:srgbClr val="111827"/>
-                </a:solidFill>
-              </a:rPr>
-              <a:t>Technical Route</a:t>
-            </a:r>
-          </a:p>
-        </p:txBody>
-      </p:sp>
-      <p:sp>
-        <p:nvSpPr>
-          <p:cNvPr id="3" name="Stage Inputs"/>
-          <p:cNvSpPr/>
-          <p:nvPr/>
-        </p:nvSpPr>
-        <p:spPr>
-          <a:xfrm>
-            <a:off x="696016" y="2919267"/>
-            <a:ext cx="1815923" cy="1640702"/>
-          </a:xfrm>
-          <a:prstGeom prst="roundRect">
-            <a:avLst/>
-          </a:prstGeom>
-          <a:solidFill>
-            <a:srgbClr val="F9FAFB"/>
-          </a:solidFill>
-          <a:ln w="12700">
-            <a:solidFill>
-              <a:srgbClr val="9CA3AF"/>
-            </a:solidFill>
+              <a:rPr lang="en-US" sz="850">
+                <a:solidFill>
+                  <a:srgbClr val="555555"/>
+                </a:solidFill>
+              </a:rPr>
+              <a:t>Document-to-report</a:t>
+            </a:r>
+          </a:p>
+          <a:p>
+            <a:pPr algn="ctr"/>
+            <a:r>
+              <a:rPr lang="en-US" sz="850">
+                <a:solidFill>
+                  <a:srgbClr val="555555"/>
+                </a:solidFill>
+              </a:rPr>
+              <a:t>workflow demo</a:t>
+            </a:r>
+          </a:p>
+        </p:txBody>
+      </p:sp>
+      <p:sp>
+        <p:nvSpPr>
+          <p:cNvPr id="4" name="Stage Inputs"/>
+          <p:cNvSpPr/>
+          <p:nvPr/>
+        </p:nvSpPr>
+        <p:spPr>
+          <a:xfrm>
+            <a:off x="808423" y="2347053"/>
+            <a:ext cx="1905621" cy="3123683"/>
+          </a:xfrm>
+          <a:prstGeom prst="roundRect">
+            <a:avLst/>
+          </a:prstGeom>
+          <a:solidFill>
+            <a:srgbClr val="FFFFFF"/>
+          </a:solidFill>
+          <a:ln w="12700">
+            <a:solidFill>
+              <a:srgbClr val="222222"/>
+            </a:solidFill>
+            <a:prstDash val="dash"/>
           </a:ln>
         </p:spPr>
         <p:txBody>
@@ -177,7 +228,7 @@
             <a:r>
               <a:rPr lang="en-US" sz="1000">
                 <a:solidFill>
-                  <a:srgbClr val="111827"/>
+                  <a:srgbClr val="111111"/>
                 </a:solidFill>
               </a:rPr>
               <a:t/>
@@ -187,24 +238,24 @@
       </p:sp>
       <p:sp>
         <p:nvSpPr>
-          <p:cNvPr id="4" name="Header Inputs"/>
-          <p:cNvSpPr/>
-          <p:nvPr/>
-        </p:nvSpPr>
-        <p:spPr>
-          <a:xfrm>
-            <a:off x="696016" y="2919267"/>
-            <a:ext cx="1815923" cy="302653"/>
-          </a:xfrm>
-          <a:prstGeom prst="roundRect">
-            <a:avLst/>
-          </a:prstGeom>
-          <a:solidFill>
-            <a:srgbClr val="374151"/>
-          </a:solidFill>
-          <a:ln w="12700">
-            <a:solidFill>
-              <a:srgbClr val="374151"/>
+          <p:cNvPr id="5" name="Header Inputs"/>
+          <p:cNvSpPr/>
+          <p:nvPr/>
+        </p:nvSpPr>
+        <p:spPr>
+          <a:xfrm>
+            <a:off x="808423" y="2347053"/>
+            <a:ext cx="1905621" cy="331564"/>
+          </a:xfrm>
+          <a:prstGeom prst="roundRect">
+            <a:avLst/>
+          </a:prstGeom>
+          <a:solidFill>
+            <a:srgbClr val="FFFFFF"/>
+          </a:solidFill>
+          <a:ln w="12700">
+            <a:solidFill>
+              <a:srgbClr val="FFFFFF"/>
             </a:solidFill>
           </a:ln>
         </p:spPr>
@@ -216,7 +267,7 @@
             <a:r>
               <a:rPr lang="en-US" sz="1100" b="1">
                 <a:solidFill>
-                  <a:srgbClr val="FFFFFF"/>
+                  <a:srgbClr val="111111"/>
                 </a:solidFill>
               </a:rPr>
               <a:t>Inputs</a:t>
@@ -226,25 +277,26 @@
       </p:sp>
       <p:sp>
         <p:nvSpPr>
-          <p:cNvPr id="5" name="Stage Ingestion"/>
-          <p:cNvSpPr/>
-          <p:nvPr/>
-        </p:nvSpPr>
-        <p:spPr>
-          <a:xfrm>
-            <a:off x="2942027" y="2919267"/>
-            <a:ext cx="1815923" cy="1640702"/>
-          </a:xfrm>
-          <a:prstGeom prst="roundRect">
-            <a:avLst/>
-          </a:prstGeom>
-          <a:solidFill>
-            <a:srgbClr val="F9FAFB"/>
-          </a:solidFill>
-          <a:ln w="12700">
-            <a:solidFill>
-              <a:srgbClr val="9CA3AF"/>
-            </a:solidFill>
+          <p:cNvPr id="6" name="Stage Ingestion"/>
+          <p:cNvSpPr/>
+          <p:nvPr/>
+        </p:nvSpPr>
+        <p:spPr>
+          <a:xfrm>
+            <a:off x="2975806" y="2347053"/>
+            <a:ext cx="1905621" cy="3123683"/>
+          </a:xfrm>
+          <a:prstGeom prst="roundRect">
+            <a:avLst/>
+          </a:prstGeom>
+          <a:solidFill>
+            <a:srgbClr val="F7F7F7"/>
+          </a:solidFill>
+          <a:ln w="12700">
+            <a:solidFill>
+              <a:srgbClr val="222222"/>
+            </a:solidFill>
+            <a:prstDash val="dash"/>
           </a:ln>
         </p:spPr>
         <p:txBody>
@@ -255,7 +307,7 @@
             <a:r>
               <a:rPr lang="en-US" sz="1000">
                 <a:solidFill>
-                  <a:srgbClr val="111827"/>
+                  <a:srgbClr val="111111"/>
                 </a:solidFill>
               </a:rPr>
               <a:t/>
@@ -265,24 +317,24 @@
       </p:sp>
       <p:sp>
         <p:nvSpPr>
-          <p:cNvPr id="6" name="Header Ingestion"/>
-          <p:cNvSpPr/>
-          <p:nvPr/>
-        </p:nvSpPr>
-        <p:spPr>
-          <a:xfrm>
-            <a:off x="2942027" y="2919267"/>
-            <a:ext cx="1815923" cy="302653"/>
-          </a:xfrm>
-          <a:prstGeom prst="roundRect">
-            <a:avLst/>
-          </a:prstGeom>
-          <a:solidFill>
-            <a:srgbClr val="374151"/>
-          </a:solidFill>
-          <a:ln w="12700">
-            <a:solidFill>
-              <a:srgbClr val="374151"/>
+          <p:cNvPr id="7" name="Header Ingestion"/>
+          <p:cNvSpPr/>
+          <p:nvPr/>
+        </p:nvSpPr>
+        <p:spPr>
+          <a:xfrm>
+            <a:off x="2975806" y="2347053"/>
+            <a:ext cx="1905621" cy="331564"/>
+          </a:xfrm>
+          <a:prstGeom prst="roundRect">
+            <a:avLst/>
+          </a:prstGeom>
+          <a:solidFill>
+            <a:srgbClr val="FFFFFF"/>
+          </a:solidFill>
+          <a:ln w="12700">
+            <a:solidFill>
+              <a:srgbClr val="FFFFFF"/>
             </a:solidFill>
           </a:ln>
         </p:spPr>
@@ -294,7 +346,7 @@
             <a:r>
               <a:rPr lang="en-US" sz="1100" b="1">
                 <a:solidFill>
-                  <a:srgbClr val="FFFFFF"/>
+                  <a:srgbClr val="111111"/>
                 </a:solidFill>
               </a:rPr>
               <a:t>Ingestion</a:t>
@@ -304,25 +356,26 @@
       </p:sp>
       <p:sp>
         <p:nvSpPr>
-          <p:cNvPr id="7" name="Stage Analysis"/>
-          <p:cNvSpPr/>
-          <p:nvPr/>
-        </p:nvSpPr>
-        <p:spPr>
-          <a:xfrm>
-            <a:off x="5188038" y="2919267"/>
-            <a:ext cx="1815923" cy="1640702"/>
-          </a:xfrm>
-          <a:prstGeom prst="roundRect">
-            <a:avLst/>
-          </a:prstGeom>
-          <a:solidFill>
-            <a:srgbClr val="F9FAFB"/>
-          </a:solidFill>
-          <a:ln w="12700">
-            <a:solidFill>
-              <a:srgbClr val="9CA3AF"/>
-            </a:solidFill>
+          <p:cNvPr id="8" name="Stage Analysis"/>
+          <p:cNvSpPr/>
+          <p:nvPr/>
+        </p:nvSpPr>
+        <p:spPr>
+          <a:xfrm>
+            <a:off x="5143189" y="2347053"/>
+            <a:ext cx="1905621" cy="3123683"/>
+          </a:xfrm>
+          <a:prstGeom prst="roundRect">
+            <a:avLst/>
+          </a:prstGeom>
+          <a:solidFill>
+            <a:srgbClr val="FFFFFF"/>
+          </a:solidFill>
+          <a:ln w="12700">
+            <a:solidFill>
+              <a:srgbClr val="222222"/>
+            </a:solidFill>
+            <a:prstDash val="dash"/>
           </a:ln>
         </p:spPr>
         <p:txBody>
@@ -333,7 +386,7 @@
             <a:r>
               <a:rPr lang="en-US" sz="1000">
                 <a:solidFill>
-                  <a:srgbClr val="111827"/>
+                  <a:srgbClr val="111111"/>
                 </a:solidFill>
               </a:rPr>
               <a:t/>
@@ -343,24 +396,24 @@
       </p:sp>
       <p:sp>
         <p:nvSpPr>
-          <p:cNvPr id="8" name="Header Analysis"/>
-          <p:cNvSpPr/>
-          <p:nvPr/>
-        </p:nvSpPr>
-        <p:spPr>
-          <a:xfrm>
-            <a:off x="5188038" y="2919267"/>
-            <a:ext cx="1815923" cy="302653"/>
-          </a:xfrm>
-          <a:prstGeom prst="roundRect">
-            <a:avLst/>
-          </a:prstGeom>
-          <a:solidFill>
-            <a:srgbClr val="374151"/>
-          </a:solidFill>
-          <a:ln w="12700">
-            <a:solidFill>
-              <a:srgbClr val="374151"/>
+          <p:cNvPr id="9" name="Header Analysis"/>
+          <p:cNvSpPr/>
+          <p:nvPr/>
+        </p:nvSpPr>
+        <p:spPr>
+          <a:xfrm>
+            <a:off x="5143189" y="2347053"/>
+            <a:ext cx="1905621" cy="331564"/>
+          </a:xfrm>
+          <a:prstGeom prst="roundRect">
+            <a:avLst/>
+          </a:prstGeom>
+          <a:solidFill>
+            <a:srgbClr val="FFFFFF"/>
+          </a:solidFill>
+          <a:ln w="12700">
+            <a:solidFill>
+              <a:srgbClr val="FFFFFF"/>
             </a:solidFill>
           </a:ln>
         </p:spPr>
@@ -372,7 +425,7 @@
             <a:r>
               <a:rPr lang="en-US" sz="1100" b="1">
                 <a:solidFill>
-                  <a:srgbClr val="FFFFFF"/>
+                  <a:srgbClr val="111111"/>
                 </a:solidFill>
               </a:rPr>
               <a:t>Analysis</a:t>
@@ -382,25 +435,26 @@
       </p:sp>
       <p:sp>
         <p:nvSpPr>
-          <p:cNvPr id="9" name="Stage Rendering"/>
-          <p:cNvSpPr/>
-          <p:nvPr/>
-        </p:nvSpPr>
-        <p:spPr>
-          <a:xfrm>
-            <a:off x="7434049" y="2919267"/>
-            <a:ext cx="1815923" cy="1640702"/>
-          </a:xfrm>
-          <a:prstGeom prst="roundRect">
-            <a:avLst/>
-          </a:prstGeom>
-          <a:solidFill>
-            <a:srgbClr val="F9FAFB"/>
-          </a:solidFill>
-          <a:ln w="12700">
-            <a:solidFill>
-              <a:srgbClr val="9CA3AF"/>
-            </a:solidFill>
+          <p:cNvPr id="10" name="Stage Rendering"/>
+          <p:cNvSpPr/>
+          <p:nvPr/>
+        </p:nvSpPr>
+        <p:spPr>
+          <a:xfrm>
+            <a:off x="7310571" y="2347053"/>
+            <a:ext cx="1905621" cy="3123683"/>
+          </a:xfrm>
+          <a:prstGeom prst="roundRect">
+            <a:avLst/>
+          </a:prstGeom>
+          <a:solidFill>
+            <a:srgbClr val="F7F7F7"/>
+          </a:solidFill>
+          <a:ln w="12700">
+            <a:solidFill>
+              <a:srgbClr val="222222"/>
+            </a:solidFill>
+            <a:prstDash val="dash"/>
           </a:ln>
         </p:spPr>
         <p:txBody>
@@ -411,7 +465,7 @@
             <a:r>
               <a:rPr lang="en-US" sz="1000">
                 <a:solidFill>
-                  <a:srgbClr val="111827"/>
+                  <a:srgbClr val="111111"/>
                 </a:solidFill>
               </a:rPr>
               <a:t/>
@@ -421,24 +475,24 @@
       </p:sp>
       <p:sp>
         <p:nvSpPr>
-          <p:cNvPr id="10" name="Header Rendering"/>
-          <p:cNvSpPr/>
-          <p:nvPr/>
-        </p:nvSpPr>
-        <p:spPr>
-          <a:xfrm>
-            <a:off x="7434049" y="2919267"/>
-            <a:ext cx="1815923" cy="302653"/>
-          </a:xfrm>
-          <a:prstGeom prst="roundRect">
-            <a:avLst/>
-          </a:prstGeom>
-          <a:solidFill>
-            <a:srgbClr val="374151"/>
-          </a:solidFill>
-          <a:ln w="12700">
-            <a:solidFill>
-              <a:srgbClr val="374151"/>
+          <p:cNvPr id="11" name="Header Rendering"/>
+          <p:cNvSpPr/>
+          <p:nvPr/>
+        </p:nvSpPr>
+        <p:spPr>
+          <a:xfrm>
+            <a:off x="7310571" y="2347053"/>
+            <a:ext cx="1905621" cy="331564"/>
+          </a:xfrm>
+          <a:prstGeom prst="roundRect">
+            <a:avLst/>
+          </a:prstGeom>
+          <a:solidFill>
+            <a:srgbClr val="FFFFFF"/>
+          </a:solidFill>
+          <a:ln w="12700">
+            <a:solidFill>
+              <a:srgbClr val="FFFFFF"/>
             </a:solidFill>
           </a:ln>
         </p:spPr>
@@ -450,7 +504,7 @@
             <a:r>
               <a:rPr lang="en-US" sz="1100" b="1">
                 <a:solidFill>
-                  <a:srgbClr val="FFFFFF"/>
+                  <a:srgbClr val="111111"/>
                 </a:solidFill>
               </a:rPr>
               <a:t>Rendering</a:t>
@@ -460,25 +514,26 @@
       </p:sp>
       <p:sp>
         <p:nvSpPr>
-          <p:cNvPr id="11" name="Stage Quality Gate"/>
-          <p:cNvSpPr/>
-          <p:nvPr/>
-        </p:nvSpPr>
-        <p:spPr>
-          <a:xfrm>
-            <a:off x="9680059" y="2919267"/>
-            <a:ext cx="1815923" cy="1640702"/>
-          </a:xfrm>
-          <a:prstGeom prst="roundRect">
-            <a:avLst/>
-          </a:prstGeom>
-          <a:solidFill>
-            <a:srgbClr val="F9FAFB"/>
-          </a:solidFill>
-          <a:ln w="12700">
-            <a:solidFill>
-              <a:srgbClr val="9CA3AF"/>
-            </a:solidFill>
+          <p:cNvPr id="12" name="Stage Quality Gate"/>
+          <p:cNvSpPr/>
+          <p:nvPr/>
+        </p:nvSpPr>
+        <p:spPr>
+          <a:xfrm>
+            <a:off x="9477954" y="2347053"/>
+            <a:ext cx="1905621" cy="3123683"/>
+          </a:xfrm>
+          <a:prstGeom prst="roundRect">
+            <a:avLst/>
+          </a:prstGeom>
+          <a:solidFill>
+            <a:srgbClr val="FFFFFF"/>
+          </a:solidFill>
+          <a:ln w="12700">
+            <a:solidFill>
+              <a:srgbClr val="222222"/>
+            </a:solidFill>
+            <a:prstDash val="dash"/>
           </a:ln>
         </p:spPr>
         <p:txBody>
@@ -489,7 +544,7 @@
             <a:r>
               <a:rPr lang="en-US" sz="1000">
                 <a:solidFill>
-                  <a:srgbClr val="111827"/>
+                  <a:srgbClr val="111111"/>
                 </a:solidFill>
               </a:rPr>
               <a:t/>
@@ -499,24 +554,24 @@
       </p:sp>
       <p:sp>
         <p:nvSpPr>
-          <p:cNvPr id="12" name="Header Quality Gate"/>
-          <p:cNvSpPr/>
-          <p:nvPr/>
-        </p:nvSpPr>
-        <p:spPr>
-          <a:xfrm>
-            <a:off x="9680059" y="2919267"/>
-            <a:ext cx="1815923" cy="302653"/>
-          </a:xfrm>
-          <a:prstGeom prst="roundRect">
-            <a:avLst/>
-          </a:prstGeom>
-          <a:solidFill>
-            <a:srgbClr val="374151"/>
-          </a:solidFill>
-          <a:ln w="12700">
-            <a:solidFill>
-              <a:srgbClr val="374151"/>
+          <p:cNvPr id="13" name="Header Quality Gate"/>
+          <p:cNvSpPr/>
+          <p:nvPr/>
+        </p:nvSpPr>
+        <p:spPr>
+          <a:xfrm>
+            <a:off x="9477954" y="2347053"/>
+            <a:ext cx="1905621" cy="331564"/>
+          </a:xfrm>
+          <a:prstGeom prst="roundRect">
+            <a:avLst/>
+          </a:prstGeom>
+          <a:solidFill>
+            <a:srgbClr val="FFFFFF"/>
+          </a:solidFill>
+          <a:ln w="12700">
+            <a:solidFill>
+              <a:srgbClr val="FFFFFF"/>
             </a:solidFill>
           </a:ln>
         </p:spPr>
@@ -528,7 +583,7 @@
             <a:r>
               <a:rPr lang="en-US" sz="1100" b="1">
                 <a:solidFill>
-                  <a:srgbClr val="FFFFFF"/>
+                  <a:srgbClr val="111111"/>
                 </a:solidFill>
               </a:rPr>
               <a:t>Quality Gate</a:t>
@@ -536,28 +591,6 @@
           </a:p>
         </p:txBody>
       </p:sp>
-      <p:cxnSp>
-        <p:nvCxnSpPr>
-          <p:cNvPr id="13" name="Connector 13"/>
-          <p:cNvCxnSpPr/>
-          <p:nvPr/>
-        </p:nvCxnSpPr>
-        <p:spPr>
-          <a:xfrm>
-            <a:off x="1603978" y="3596256"/>
-            <a:ext cx="2246010" cy="1"/>
-          </a:xfrm>
-          <a:prstGeom prst="line">
-            <a:avLst/>
-          </a:prstGeom>
-          <a:ln w="19050">
-            <a:solidFill>
-              <a:srgbClr val="1F2937"/>
-            </a:solidFill>
-            <a:headEnd type="triangle"/>
-          </a:ln>
-        </p:spPr>
-      </p:cxnSp>
       <p:cxnSp>
         <p:nvCxnSpPr>
           <p:cNvPr id="14" name="Connector 14"/>
@@ -566,15 +599,15 @@
         </p:nvCxnSpPr>
         <p:spPr>
           <a:xfrm>
-            <a:off x="3849989" y="3596256"/>
-            <a:ext cx="1" cy="589378"/>
+            <a:off x="1761234" y="3141062"/>
+            <a:ext cx="2167382" cy="1"/>
           </a:xfrm>
           <a:prstGeom prst="line">
             <a:avLst/>
           </a:prstGeom>
           <a:ln w="19050">
             <a:solidFill>
-              <a:srgbClr val="1F2937"/>
+              <a:srgbClr val="111111"/>
             </a:solidFill>
             <a:headEnd type="triangle"/>
           </a:ln>
@@ -587,16 +620,16 @@
           <p:nvPr/>
         </p:nvCxnSpPr>
         <p:spPr>
-          <a:xfrm flipV="1">
-            <a:off x="3849989" y="3596256"/>
-            <a:ext cx="2246010" cy="589378"/>
+          <a:xfrm>
+            <a:off x="3928617" y="3141062"/>
+            <a:ext cx="1" cy="680579"/>
           </a:xfrm>
           <a:prstGeom prst="line">
             <a:avLst/>
           </a:prstGeom>
           <a:ln w="19050">
             <a:solidFill>
-              <a:srgbClr val="1F2937"/>
+              <a:srgbClr val="111111"/>
             </a:solidFill>
             <a:headEnd type="triangle"/>
           </a:ln>
@@ -609,16 +642,16 @@
           <p:nvPr/>
         </p:nvCxnSpPr>
         <p:spPr>
-          <a:xfrm>
-            <a:off x="6096000" y="3596256"/>
-            <a:ext cx="1" cy="589378"/>
+          <a:xfrm flipV="1">
+            <a:off x="3928617" y="3141062"/>
+            <a:ext cx="2167382" cy="680579"/>
           </a:xfrm>
           <a:prstGeom prst="line">
             <a:avLst/>
           </a:prstGeom>
           <a:ln w="19050">
             <a:solidFill>
-              <a:srgbClr val="1F2937"/>
+              <a:srgbClr val="111111"/>
             </a:solidFill>
             <a:headEnd type="triangle"/>
           </a:ln>
@@ -631,16 +664,16 @@
           <p:nvPr/>
         </p:nvCxnSpPr>
         <p:spPr>
-          <a:xfrm flipV="1">
-            <a:off x="6096000" y="3596256"/>
-            <a:ext cx="2246010" cy="589378"/>
+          <a:xfrm>
+            <a:off x="6096000" y="3141062"/>
+            <a:ext cx="1" cy="680579"/>
           </a:xfrm>
           <a:prstGeom prst="line">
             <a:avLst/>
           </a:prstGeom>
           <a:ln w="19050">
             <a:solidFill>
-              <a:srgbClr val="1F2937"/>
+              <a:srgbClr val="111111"/>
             </a:solidFill>
             <a:headEnd type="triangle"/>
           </a:ln>
@@ -653,16 +686,16 @@
           <p:nvPr/>
         </p:nvCxnSpPr>
         <p:spPr>
-          <a:xfrm>
-            <a:off x="8342010" y="3596256"/>
-            <a:ext cx="1" cy="589378"/>
+          <a:xfrm flipV="1">
+            <a:off x="6096000" y="3141062"/>
+            <a:ext cx="2167382" cy="680579"/>
           </a:xfrm>
           <a:prstGeom prst="line">
             <a:avLst/>
           </a:prstGeom>
           <a:ln w="19050">
             <a:solidFill>
-              <a:srgbClr val="1F2937"/>
+              <a:srgbClr val="111111"/>
             </a:solidFill>
             <a:headEnd type="triangle"/>
           </a:ln>
@@ -675,16 +708,16 @@
           <p:nvPr/>
         </p:nvCxnSpPr>
         <p:spPr>
-          <a:xfrm flipV="1">
-            <a:off x="8342010" y="3596256"/>
-            <a:ext cx="2246010" cy="589378"/>
+          <a:xfrm>
+            <a:off x="8263382" y="3141062"/>
+            <a:ext cx="1" cy="680579"/>
           </a:xfrm>
           <a:prstGeom prst="line">
             <a:avLst/>
           </a:prstGeom>
           <a:ln w="19050">
             <a:solidFill>
-              <a:srgbClr val="1F2937"/>
+              <a:srgbClr val="111111"/>
             </a:solidFill>
             <a:headEnd type="triangle"/>
           </a:ln>
@@ -697,41 +730,63 @@
           <p:nvPr/>
         </p:nvCxnSpPr>
         <p:spPr>
-          <a:xfrm>
-            <a:off x="10588021" y="3596256"/>
-            <a:ext cx="1" cy="589378"/>
+          <a:xfrm flipV="1">
+            <a:off x="8263382" y="3141062"/>
+            <a:ext cx="2167382" cy="680579"/>
           </a:xfrm>
           <a:prstGeom prst="line">
             <a:avLst/>
           </a:prstGeom>
           <a:ln w="19050">
             <a:solidFill>
-              <a:srgbClr val="1F2937"/>
+              <a:srgbClr val="111111"/>
             </a:solidFill>
             <a:headEnd type="triangle"/>
           </a:ln>
         </p:spPr>
       </p:cxnSp>
-      <p:sp>
-        <p:nvSpPr>
-          <p:cNvPr id="21" name="Node inputs_files"/>
-          <p:cNvSpPr/>
-          <p:nvPr/>
-        </p:nvSpPr>
-        <p:spPr>
-          <a:xfrm>
-            <a:off x="895130" y="3365283"/>
-            <a:ext cx="1417694" cy="461945"/>
-          </a:xfrm>
-          <a:prstGeom prst="roundRect">
-            <a:avLst/>
-          </a:prstGeom>
-          <a:solidFill>
-            <a:srgbClr val="FFFFFF"/>
-          </a:solidFill>
-          <a:ln w="12700">
-            <a:solidFill>
-              <a:srgbClr val="111827"/>
+      <p:cxnSp>
+        <p:nvCxnSpPr>
+          <p:cNvPr id="21" name="Connector 21"/>
+          <p:cNvCxnSpPr/>
+          <p:nvPr/>
+        </p:nvCxnSpPr>
+        <p:spPr>
+          <a:xfrm>
+            <a:off x="10430765" y="3141062"/>
+            <a:ext cx="1" cy="680579"/>
+          </a:xfrm>
+          <a:prstGeom prst="line">
+            <a:avLst/>
+          </a:prstGeom>
+          <a:ln w="19050">
+            <a:solidFill>
+              <a:srgbClr val="111111"/>
+            </a:solidFill>
+            <a:headEnd type="triangle"/>
+          </a:ln>
+        </p:spPr>
+      </p:cxnSp>
+      <p:sp>
+        <p:nvSpPr>
+          <p:cNvPr id="22" name="Node inputs_files"/>
+          <p:cNvSpPr/>
+          <p:nvPr/>
+        </p:nvSpPr>
+        <p:spPr>
+          <a:xfrm>
+            <a:off x="991656" y="2870576"/>
+            <a:ext cx="1539155" cy="540973"/>
+          </a:xfrm>
+          <a:prstGeom prst="roundRect">
+            <a:avLst/>
+          </a:prstGeom>
+          <a:solidFill>
+            <a:srgbClr val="FFFFFF"/>
+          </a:solidFill>
+          <a:ln w="12700">
+            <a:solidFill>
+              <a:srgbClr val="222222"/>
             </a:solidFill>
           </a:ln>
         </p:spPr>
@@ -743,7 +798,7 @@
             <a:r>
               <a:rPr lang="en-US" sz="1050">
                 <a:solidFill>
-                  <a:srgbClr val="111827"/>
+                  <a:srgbClr val="111111"/>
                 </a:solidFill>
               </a:rPr>
               <a:t>Receive user files</a:t>
@@ -753,24 +808,24 @@
       </p:sp>
       <p:sp>
         <p:nvSpPr>
-          <p:cNvPr id="22" name="Node ingestion_service"/>
-          <p:cNvSpPr/>
-          <p:nvPr/>
-        </p:nvSpPr>
-        <p:spPr>
-          <a:xfrm>
-            <a:off x="3141141" y="3365283"/>
-            <a:ext cx="1417694" cy="461945"/>
-          </a:xfrm>
-          <a:prstGeom prst="roundRect">
-            <a:avLst/>
-          </a:prstGeom>
-          <a:solidFill>
-            <a:srgbClr val="FFFFFF"/>
-          </a:solidFill>
-          <a:ln w="12700">
-            <a:solidFill>
-              <a:srgbClr val="111827"/>
+          <p:cNvPr id="23" name="Node ingestion_service"/>
+          <p:cNvSpPr/>
+          <p:nvPr/>
+        </p:nvSpPr>
+        <p:spPr>
+          <a:xfrm>
+            <a:off x="3159039" y="2870576"/>
+            <a:ext cx="1539155" cy="540973"/>
+          </a:xfrm>
+          <a:prstGeom prst="roundRect">
+            <a:avLst/>
+          </a:prstGeom>
+          <a:solidFill>
+            <a:srgbClr val="FFFFFF"/>
+          </a:solidFill>
+          <a:ln w="12700">
+            <a:solidFill>
+              <a:srgbClr val="222222"/>
             </a:solidFill>
           </a:ln>
         </p:spPr>
@@ -782,7 +837,7 @@
             <a:r>
               <a:rPr lang="en-US" sz="1050">
                 <a:solidFill>
-                  <a:srgbClr val="111827"/>
+                  <a:srgbClr val="111111"/>
                 </a:solidFill>
               </a:rPr>
               <a:t>Run ingestion</a:t>
@@ -793,7 +848,7 @@
             <a:r>
               <a:rPr lang="en-US" sz="1050">
                 <a:solidFill>
-                  <a:srgbClr val="111827"/>
+                  <a:srgbClr val="111111"/>
                 </a:solidFill>
               </a:rPr>
               <a:t>service</a:t>
@@ -803,24 +858,24 @@
       </p:sp>
       <p:sp>
         <p:nvSpPr>
-          <p:cNvPr id="23" name="Node ingestion_store"/>
-          <p:cNvSpPr/>
-          <p:nvPr/>
-        </p:nvSpPr>
-        <p:spPr>
-          <a:xfrm>
-            <a:off x="3141141" y="3954662"/>
-            <a:ext cx="1417694" cy="461945"/>
-          </a:xfrm>
-          <a:prstGeom prst="roundRect">
-            <a:avLst/>
-          </a:prstGeom>
-          <a:solidFill>
-            <a:srgbClr val="FFFFFF"/>
-          </a:solidFill>
-          <a:ln w="12700">
-            <a:solidFill>
-              <a:srgbClr val="111827"/>
+          <p:cNvPr id="24" name="Node ingestion_store"/>
+          <p:cNvSpPr/>
+          <p:nvPr/>
+        </p:nvSpPr>
+        <p:spPr>
+          <a:xfrm>
+            <a:off x="3159039" y="3551155"/>
+            <a:ext cx="1539155" cy="540973"/>
+          </a:xfrm>
+          <a:prstGeom prst="roundRect">
+            <a:avLst/>
+          </a:prstGeom>
+          <a:solidFill>
+            <a:srgbClr val="FFFFFF"/>
+          </a:solidFill>
+          <a:ln w="12700">
+            <a:solidFill>
+              <a:srgbClr val="222222"/>
             </a:solidFill>
           </a:ln>
         </p:spPr>
@@ -832,7 +887,7 @@
             <a:r>
               <a:rPr lang="en-US" sz="1050">
                 <a:solidFill>
-                  <a:srgbClr val="111827"/>
+                  <a:srgbClr val="111111"/>
                 </a:solidFill>
               </a:rPr>
               <a:t>Normalize data</a:t>
@@ -843,7 +898,7 @@
             <a:r>
               <a:rPr lang="en-US" sz="1050">
                 <a:solidFill>
-                  <a:srgbClr val="111827"/>
+                  <a:srgbClr val="111111"/>
                 </a:solidFill>
               </a:rPr>
               <a:t>store</a:t>
@@ -853,24 +908,24 @@
       </p:sp>
       <p:sp>
         <p:nvSpPr>
-          <p:cNvPr id="24" name="Node analysis_engine"/>
-          <p:cNvSpPr/>
-          <p:nvPr/>
-        </p:nvSpPr>
-        <p:spPr>
-          <a:xfrm>
-            <a:off x="5387152" y="3365283"/>
-            <a:ext cx="1417694" cy="461945"/>
-          </a:xfrm>
-          <a:prstGeom prst="roundRect">
-            <a:avLst/>
-          </a:prstGeom>
-          <a:solidFill>
-            <a:srgbClr val="FFFFFF"/>
-          </a:solidFill>
-          <a:ln w="12700">
-            <a:solidFill>
-              <a:srgbClr val="111827"/>
+          <p:cNvPr id="25" name="Node analysis_engine"/>
+          <p:cNvSpPr/>
+          <p:nvPr/>
+        </p:nvSpPr>
+        <p:spPr>
+          <a:xfrm>
+            <a:off x="5326422" y="2870576"/>
+            <a:ext cx="1539155" cy="540973"/>
+          </a:xfrm>
+          <a:prstGeom prst="roundRect">
+            <a:avLst/>
+          </a:prstGeom>
+          <a:solidFill>
+            <a:srgbClr val="FFFFFF"/>
+          </a:solidFill>
+          <a:ln w="12700">
+            <a:solidFill>
+              <a:srgbClr val="222222"/>
             </a:solidFill>
           </a:ln>
         </p:spPr>
@@ -882,7 +937,7 @@
             <a:r>
               <a:rPr lang="en-US" sz="1050">
                 <a:solidFill>
-                  <a:srgbClr val="111827"/>
+                  <a:srgbClr val="111111"/>
                 </a:solidFill>
               </a:rPr>
               <a:t>Run analysis</a:t>
@@ -893,7 +948,7 @@
             <a:r>
               <a:rPr lang="en-US" sz="1050">
                 <a:solidFill>
-                  <a:srgbClr val="111827"/>
+                  <a:srgbClr val="111111"/>
                 </a:solidFill>
               </a:rPr>
               <a:t>engine</a:t>
@@ -903,24 +958,24 @@
       </p:sp>
       <p:sp>
         <p:nvSpPr>
-          <p:cNvPr id="25" name="Node analysis_provenance"/>
-          <p:cNvSpPr/>
-          <p:nvPr/>
-        </p:nvSpPr>
-        <p:spPr>
-          <a:xfrm>
-            <a:off x="5387152" y="3954662"/>
-            <a:ext cx="1417694" cy="461945"/>
-          </a:xfrm>
-          <a:prstGeom prst="roundRect">
-            <a:avLst/>
-          </a:prstGeom>
-          <a:solidFill>
-            <a:srgbClr val="FFFFFF"/>
-          </a:solidFill>
-          <a:ln w="12700">
-            <a:solidFill>
-              <a:srgbClr val="111827"/>
+          <p:cNvPr id="26" name="Node analysis_provenance"/>
+          <p:cNvSpPr/>
+          <p:nvPr/>
+        </p:nvSpPr>
+        <p:spPr>
+          <a:xfrm>
+            <a:off x="5326422" y="3551155"/>
+            <a:ext cx="1539155" cy="540973"/>
+          </a:xfrm>
+          <a:prstGeom prst="roundRect">
+            <a:avLst/>
+          </a:prstGeom>
+          <a:solidFill>
+            <a:srgbClr val="FFFFFF"/>
+          </a:solidFill>
+          <a:ln w="12700">
+            <a:solidFill>
+              <a:srgbClr val="222222"/>
             </a:solidFill>
           </a:ln>
         </p:spPr>
@@ -932,7 +987,7 @@
             <a:r>
               <a:rPr lang="en-US" sz="1050">
                 <a:solidFill>
-                  <a:srgbClr val="111827"/>
+                  <a:srgbClr val="111111"/>
                 </a:solidFill>
               </a:rPr>
               <a:t>Track provenance</a:t>
@@ -942,24 +997,24 @@
       </p:sp>
       <p:sp>
         <p:nvSpPr>
-          <p:cNvPr id="26" name="Node render_reports"/>
-          <p:cNvSpPr/>
-          <p:nvPr/>
-        </p:nvSpPr>
-        <p:spPr>
-          <a:xfrm>
-            <a:off x="7633163" y="3365283"/>
-            <a:ext cx="1417694" cy="461945"/>
-          </a:xfrm>
-          <a:prstGeom prst="roundRect">
-            <a:avLst/>
-          </a:prstGeom>
-          <a:solidFill>
-            <a:srgbClr val="FFFFFF"/>
-          </a:solidFill>
-          <a:ln w="12700">
-            <a:solidFill>
-              <a:srgbClr val="111827"/>
+          <p:cNvPr id="27" name="Node render_reports"/>
+          <p:cNvSpPr/>
+          <p:nvPr/>
+        </p:nvSpPr>
+        <p:spPr>
+          <a:xfrm>
+            <a:off x="7493804" y="2870576"/>
+            <a:ext cx="1539155" cy="540973"/>
+          </a:xfrm>
+          <a:prstGeom prst="roundRect">
+            <a:avLst/>
+          </a:prstGeom>
+          <a:solidFill>
+            <a:srgbClr val="FFFFFF"/>
+          </a:solidFill>
+          <a:ln w="12700">
+            <a:solidFill>
+              <a:srgbClr val="222222"/>
             </a:solidFill>
           </a:ln>
         </p:spPr>
@@ -971,7 +1026,7 @@
             <a:r>
               <a:rPr lang="en-US" sz="1050">
                 <a:solidFill>
-                  <a:srgbClr val="111827"/>
+                  <a:srgbClr val="111111"/>
                 </a:solidFill>
               </a:rPr>
               <a:t>Render reports</a:t>
@@ -981,24 +1036,24 @@
       </p:sp>
       <p:sp>
         <p:nvSpPr>
-          <p:cNvPr id="27" name="Node render_registry"/>
-          <p:cNvSpPr/>
-          <p:nvPr/>
-        </p:nvSpPr>
-        <p:spPr>
-          <a:xfrm>
-            <a:off x="7633163" y="3954662"/>
-            <a:ext cx="1417694" cy="461945"/>
-          </a:xfrm>
-          <a:prstGeom prst="roundRect">
-            <a:avLst/>
-          </a:prstGeom>
-          <a:solidFill>
-            <a:srgbClr val="FFFFFF"/>
-          </a:solidFill>
-          <a:ln w="12700">
-            <a:solidFill>
-              <a:srgbClr val="111827"/>
+          <p:cNvPr id="28" name="Node render_registry"/>
+          <p:cNvSpPr/>
+          <p:nvPr/>
+        </p:nvSpPr>
+        <p:spPr>
+          <a:xfrm>
+            <a:off x="7493804" y="3551155"/>
+            <a:ext cx="1539155" cy="540973"/>
+          </a:xfrm>
+          <a:prstGeom prst="roundRect">
+            <a:avLst/>
+          </a:prstGeom>
+          <a:solidFill>
+            <a:srgbClr val="FFFFFF"/>
+          </a:solidFill>
+          <a:ln w="12700">
+            <a:solidFill>
+              <a:srgbClr val="222222"/>
             </a:solidFill>
           </a:ln>
         </p:spPr>
@@ -1010,7 +1065,7 @@
             <a:r>
               <a:rPr lang="en-US" sz="1050">
                 <a:solidFill>
-                  <a:srgbClr val="111827"/>
+                  <a:srgbClr val="111111"/>
                 </a:solidFill>
               </a:rPr>
               <a:t>Register artifacts</a:t>
@@ -1020,24 +1075,24 @@
       </p:sp>
       <p:sp>
         <p:nvSpPr>
-          <p:cNvPr id="28" name="Node quality_rules"/>
-          <p:cNvSpPr/>
-          <p:nvPr/>
-        </p:nvSpPr>
-        <p:spPr>
-          <a:xfrm>
-            <a:off x="9879174" y="3365283"/>
-            <a:ext cx="1417694" cy="461945"/>
-          </a:xfrm>
-          <a:prstGeom prst="roundRect">
-            <a:avLst/>
-          </a:prstGeom>
-          <a:solidFill>
-            <a:srgbClr val="FFFFFF"/>
-          </a:solidFill>
-          <a:ln w="12700">
-            <a:solidFill>
-              <a:srgbClr val="111827"/>
+          <p:cNvPr id="29" name="Node quality_rules"/>
+          <p:cNvSpPr/>
+          <p:nvPr/>
+        </p:nvSpPr>
+        <p:spPr>
+          <a:xfrm>
+            <a:off x="9661187" y="2870576"/>
+            <a:ext cx="1539155" cy="540973"/>
+          </a:xfrm>
+          <a:prstGeom prst="roundRect">
+            <a:avLst/>
+          </a:prstGeom>
+          <a:solidFill>
+            <a:srgbClr val="FFFFFF"/>
+          </a:solidFill>
+          <a:ln w="12700">
+            <a:solidFill>
+              <a:srgbClr val="222222"/>
             </a:solidFill>
           </a:ln>
         </p:spPr>
@@ -1049,7 +1104,7 @@
             <a:r>
               <a:rPr lang="en-US" sz="1050">
                 <a:solidFill>
-                  <a:srgbClr val="111827"/>
+                  <a:srgbClr val="111111"/>
                 </a:solidFill>
               </a:rPr>
               <a:t>Apply validation</a:t>
@@ -1060,7 +1115,7 @@
             <a:r>
               <a:rPr lang="en-US" sz="1050">
                 <a:solidFill>
-                  <a:srgbClr val="111827"/>
+                  <a:srgbClr val="111111"/>
                 </a:solidFill>
               </a:rPr>
               <a:t>rules</a:t>
@@ -1070,24 +1125,24 @@
       </p:sp>
       <p:sp>
         <p:nvSpPr>
-          <p:cNvPr id="29" name="Node quality_ci"/>
-          <p:cNvSpPr/>
-          <p:nvPr/>
-        </p:nvSpPr>
-        <p:spPr>
-          <a:xfrm>
-            <a:off x="9879174" y="3954662"/>
-            <a:ext cx="1417694" cy="461945"/>
-          </a:xfrm>
-          <a:prstGeom prst="roundRect">
-            <a:avLst/>
-          </a:prstGeom>
-          <a:solidFill>
-            <a:srgbClr val="FFFFFF"/>
-          </a:solidFill>
-          <a:ln w="12700">
-            <a:solidFill>
-              <a:srgbClr val="111827"/>
+          <p:cNvPr id="30" name="Node quality_ci"/>
+          <p:cNvSpPr/>
+          <p:nvPr/>
+        </p:nvSpPr>
+        <p:spPr>
+          <a:xfrm>
+            <a:off x="9661187" y="3551155"/>
+            <a:ext cx="1539155" cy="540973"/>
+          </a:xfrm>
+          <a:prstGeom prst="roundRect">
+            <a:avLst/>
+          </a:prstGeom>
+          <a:solidFill>
+            <a:srgbClr val="FFFFFF"/>
+          </a:solidFill>
+          <a:ln w="12700">
+            <a:solidFill>
+              <a:srgbClr val="222222"/>
             </a:solidFill>
           </a:ln>
         </p:spPr>
@@ -1099,7 +1154,7 @@
             <a:r>
               <a:rPr lang="en-US" sz="1050">
                 <a:solidFill>
-                  <a:srgbClr val="111827"/>
+                  <a:srgbClr val="111111"/>
                 </a:solidFill>
               </a:rPr>
               <a:t>Publish through CI</a:t>
